--- a/classes/03-31-aug-solving-implementing/slides/solving-implementing.pptx
+++ b/classes/03-31-aug-solving-implementing/slides/solving-implementing.pptx
@@ -3485,7 +3485,7 @@
             </a:r>
             <a:r>
               <a:rPr lang="da-DK" dirty="0"/>
-              <a:t> ”</a:t>
+              <a:t> ”reel” </a:t>
             </a:r>
             <a:r>
               <a:rPr lang="da-DK" dirty="0" err="1"/>
@@ -3501,7 +3501,7 @@
             </a:r>
             <a:r>
               <a:rPr lang="da-DK" dirty="0"/>
-              <a:t>”</a:t>
+              <a:t>?</a:t>
             </a:r>
           </a:p>
           <a:p>
@@ -9228,11 +9228,11 @@
 </file>
 
 <file path=customXml/item1.xml><?xml version="1.0" encoding="utf-8"?>
-<TemplafyFormConfiguration><![CDATA[{"formFields":[],"formDataEntries":[]}]]></TemplafyFormConfiguration>
+<TemplafyTemplateConfiguration><![CDATA[{"elementsMetadata":[],"transformationConfigurations":[],"templateName":"blankpresentation","templateDescription":"","enableDocumentContentUpdater":false,"version":"2.0"}]]></TemplafyTemplateConfiguration>
 </file>
 
 <file path=customXml/item2.xml><?xml version="1.0" encoding="utf-8"?>
-<TemplafyTemplateConfiguration><![CDATA[{"elementsMetadata":[],"transformationConfigurations":[],"templateName":"blankpresentation","templateDescription":"","enableDocumentContentUpdater":false,"version":"2.0"}]]></TemplafyTemplateConfiguration>
+<TemplafyFormConfiguration><![CDATA[{"formFields":[],"formDataEntries":[]}]]></TemplafyFormConfiguration>
 </file>
 
 <file path=customXml/item3.xml><?xml version="1.0" encoding="utf-8"?>
@@ -9244,13 +9244,13 @@
 </file>
 
 <file path=customXml/itemProps1.xml><?xml version="1.0" encoding="utf-8"?>
-<ds:datastoreItem xmlns:ds="http://schemas.openxmlformats.org/officeDocument/2006/customXml" ds:itemID="{C5938109-F486-41EA-929F-D7DF65C5D6B1}">
+<ds:datastoreItem xmlns:ds="http://schemas.openxmlformats.org/officeDocument/2006/customXml" ds:itemID="{386C9AF7-FC43-4772-BF6D-26FE95C56D62}">
   <ds:schemaRefs/>
 </ds:datastoreItem>
 </file>
 
 <file path=customXml/itemProps2.xml><?xml version="1.0" encoding="utf-8"?>
-<ds:datastoreItem xmlns:ds="http://schemas.openxmlformats.org/officeDocument/2006/customXml" ds:itemID="{386C9AF7-FC43-4772-BF6D-26FE95C56D62}">
+<ds:datastoreItem xmlns:ds="http://schemas.openxmlformats.org/officeDocument/2006/customXml" ds:itemID="{C5938109-F486-41EA-929F-D7DF65C5D6B1}">
   <ds:schemaRefs/>
 </ds:datastoreItem>
 </file>

--- a/classes/03-31-aug-solving-implementing/slides/solving-implementing.pptx
+++ b/classes/03-31-aug-solving-implementing/slides/solving-implementing.pptx
@@ -13,11 +13,12 @@
     <p:sldId id="260" r:id="rId11"/>
     <p:sldId id="261" r:id="rId12"/>
     <p:sldId id="262" r:id="rId13"/>
+    <p:sldId id="264" r:id="rId14"/>
   </p:sldIdLst>
   <p:sldSz cx="12192000" cy="6858000"/>
   <p:notesSz cx="6858000" cy="9144000"/>
   <p:custDataLst>
-    <p:tags r:id="rId14"/>
+    <p:tags r:id="rId15"/>
   </p:custDataLst>
   <p:defaultTextStyle>
     <a:defPPr>
@@ -125,6 +126,14 @@
 </p:presentation>
 </file>
 
+<file path=ppt/revisionInfo.xml><?xml version="1.0" encoding="utf-8"?>
+<p1510:revInfo xmlns:a="http://schemas.openxmlformats.org/drawingml/2006/main" xmlns:r="http://schemas.openxmlformats.org/officeDocument/2006/relationships" xmlns:p1510="http://schemas.microsoft.com/office/powerpoint/2015/10/main">
+  <p1510:revLst>
+    <p1510:client id="{E586BA2A-0515-4E31-A312-858411AA9C6B}" v="2" dt="2026-08-31T10:49:42.828"/>
+  </p1510:revLst>
+</p1510:revInfo>
+</file>
+
 <file path=ppt/slideLayouts/slideLayout1.xml><?xml version="1.0" encoding="utf-8"?>
 <p:sldLayout xmlns:a="http://schemas.openxmlformats.org/drawingml/2006/main" xmlns:r="http://schemas.openxmlformats.org/officeDocument/2006/relationships" xmlns:p="http://schemas.openxmlformats.org/presentationml/2006/main" type="title" preserve="1">
   <p:cSld name="Title Slide">
@@ -272,7 +281,7 @@
           <a:p>
             <a:fld id="{1A886069-5185-423F-843D-C2F3A033B902}" type="datetimeFigureOut">
               <a:rPr lang="en-US" smtClean="0"/>
-              <a:t>8/27/2026</a:t>
+              <a:t>8/31/2026</a:t>
             </a:fld>
             <a:endParaRPr lang="en-US"/>
           </a:p>
@@ -471,7 +480,7 @@
           <a:p>
             <a:fld id="{1A886069-5185-423F-843D-C2F3A033B902}" type="datetimeFigureOut">
               <a:rPr lang="en-US" smtClean="0"/>
-              <a:t>8/27/2026</a:t>
+              <a:t>8/31/2026</a:t>
             </a:fld>
             <a:endParaRPr lang="en-US"/>
           </a:p>
@@ -680,7 +689,7 @@
           <a:p>
             <a:fld id="{1A886069-5185-423F-843D-C2F3A033B902}" type="datetimeFigureOut">
               <a:rPr lang="en-US" smtClean="0"/>
-              <a:t>8/27/2026</a:t>
+              <a:t>8/31/2026</a:t>
             </a:fld>
             <a:endParaRPr lang="en-US"/>
           </a:p>
@@ -879,7 +888,7 @@
           <a:p>
             <a:fld id="{1A886069-5185-423F-843D-C2F3A033B902}" type="datetimeFigureOut">
               <a:rPr lang="en-US" smtClean="0"/>
-              <a:t>8/27/2026</a:t>
+              <a:t>8/31/2026</a:t>
             </a:fld>
             <a:endParaRPr lang="en-US"/>
           </a:p>
@@ -1155,7 +1164,7 @@
           <a:p>
             <a:fld id="{1A886069-5185-423F-843D-C2F3A033B902}" type="datetimeFigureOut">
               <a:rPr lang="en-US" smtClean="0"/>
-              <a:t>8/27/2026</a:t>
+              <a:t>8/31/2026</a:t>
             </a:fld>
             <a:endParaRPr lang="en-US"/>
           </a:p>
@@ -1421,7 +1430,7 @@
           <a:p>
             <a:fld id="{1A886069-5185-423F-843D-C2F3A033B902}" type="datetimeFigureOut">
               <a:rPr lang="en-US" smtClean="0"/>
-              <a:t>8/27/2026</a:t>
+              <a:t>8/31/2026</a:t>
             </a:fld>
             <a:endParaRPr lang="en-US"/>
           </a:p>
@@ -1834,7 +1843,7 @@
           <a:p>
             <a:fld id="{1A886069-5185-423F-843D-C2F3A033B902}" type="datetimeFigureOut">
               <a:rPr lang="en-US" smtClean="0"/>
-              <a:t>8/27/2026</a:t>
+              <a:t>8/31/2026</a:t>
             </a:fld>
             <a:endParaRPr lang="en-US"/>
           </a:p>
@@ -1976,7 +1985,7 @@
           <a:p>
             <a:fld id="{1A886069-5185-423F-843D-C2F3A033B902}" type="datetimeFigureOut">
               <a:rPr lang="en-US" smtClean="0"/>
-              <a:t>8/27/2026</a:t>
+              <a:t>8/31/2026</a:t>
             </a:fld>
             <a:endParaRPr lang="en-US"/>
           </a:p>
@@ -2090,7 +2099,7 @@
           <a:p>
             <a:fld id="{1A886069-5185-423F-843D-C2F3A033B902}" type="datetimeFigureOut">
               <a:rPr lang="en-US" smtClean="0"/>
-              <a:t>8/27/2026</a:t>
+              <a:t>8/31/2026</a:t>
             </a:fld>
             <a:endParaRPr lang="en-US"/>
           </a:p>
@@ -2402,7 +2411,7 @@
           <a:p>
             <a:fld id="{1A886069-5185-423F-843D-C2F3A033B902}" type="datetimeFigureOut">
               <a:rPr lang="en-US" smtClean="0"/>
-              <a:t>8/27/2026</a:t>
+              <a:t>8/31/2026</a:t>
             </a:fld>
             <a:endParaRPr lang="en-US"/>
           </a:p>
@@ -2691,7 +2700,7 @@
           <a:p>
             <a:fld id="{1A886069-5185-423F-843D-C2F3A033B902}" type="datetimeFigureOut">
               <a:rPr lang="en-US" smtClean="0"/>
-              <a:t>8/27/2026</a:t>
+              <a:t>8/31/2026</a:t>
             </a:fld>
             <a:endParaRPr lang="en-US"/>
           </a:p>
@@ -2933,7 +2942,7 @@
           <a:p>
             <a:fld id="{1A886069-5185-423F-843D-C2F3A033B902}" type="datetimeFigureOut">
               <a:rPr lang="en-US" smtClean="0"/>
-              <a:t>8/27/2026</a:t>
+              <a:t>8/31/2026</a:t>
             </a:fld>
             <a:endParaRPr lang="en-US"/>
           </a:p>
@@ -3569,15 +3578,7 @@
             </a:r>
             <a:r>
               <a:rPr lang="da-DK" dirty="0"/>
-              <a:t> </a:t>
-            </a:r>
-            <a:r>
-              <a:rPr lang="da-DK" dirty="0" err="1"/>
-              <a:t>varaibles</a:t>
-            </a:r>
-            <a:r>
-              <a:rPr lang="da-DK" dirty="0"/>
-              <a:t> </a:t>
+              <a:t> variables </a:t>
             </a:r>
             <a:r>
               <a:rPr lang="da-DK" dirty="0">
@@ -5097,8 +5098,8 @@
           </a:p>
         </p:txBody>
       </p:sp>
-      <mc:AlternateContent xmlns:mc="http://schemas.openxmlformats.org/markup-compatibility/2006" xmlns:a14="http://schemas.microsoft.com/office/drawing/2010/main">
-        <mc:Choice Requires="a14">
+      <mc:AlternateContent xmlns:mc="http://schemas.openxmlformats.org/markup-compatibility/2006">
+        <mc:Choice xmlns:a14="http://schemas.microsoft.com/office/drawing/2010/main" Requires="a14">
           <p:sp>
             <p:nvSpPr>
               <p:cNvPr id="40" name="TextBox 39">
@@ -5114,7 +5115,7 @@
             <p:spPr>
               <a:xfrm>
                 <a:off x="6973989" y="5382139"/>
-                <a:ext cx="1279581" cy="281937"/>
+                <a:ext cx="1410066" cy="281937"/>
               </a:xfrm>
               <a:prstGeom prst="rect">
                 <a:avLst/>
@@ -5202,6 +5203,13 @@
                               <a:latin typeface="Cambria Math" panose="02040503050406030204" pitchFamily="18" charset="0"/>
                               <a:ea typeface="Cambria Math" panose="02040503050406030204" pitchFamily="18" charset="0"/>
                             </a:rPr>
+                            <m:t>−</m:t>
+                          </m:r>
+                          <m:r>
+                            <a:rPr lang="da-DK" b="0" i="1" smtClean="0">
+                              <a:latin typeface="Cambria Math" panose="02040503050406030204" pitchFamily="18" charset="0"/>
+                              <a:ea typeface="Cambria Math" panose="02040503050406030204" pitchFamily="18" charset="0"/>
+                            </a:rPr>
                             <m:t>𝑘</m:t>
                           </m:r>
                           <m:r>
@@ -5228,7 +5236,7 @@
             </p:txBody>
           </p:sp>
         </mc:Choice>
-        <mc:Fallback xmlns="">
+        <mc:Fallback>
           <p:sp>
             <p:nvSpPr>
               <p:cNvPr id="40" name="TextBox 39">
@@ -5246,7 +5254,7 @@
             <p:spPr>
               <a:xfrm>
                 <a:off x="6973989" y="5382139"/>
-                <a:ext cx="1279581" cy="281937"/>
+                <a:ext cx="1410066" cy="281937"/>
               </a:xfrm>
               <a:prstGeom prst="rect">
                 <a:avLst/>
@@ -5254,7 +5262,7 @@
               <a:blipFill>
                 <a:blip r:embed="rId4"/>
                 <a:stretch>
-                  <a:fillRect l="-4286" t="-2174" r="-1429" b="-15217"/>
+                  <a:fillRect l="-3463" t="-2174" r="-866" b="-15217"/>
                 </a:stretch>
               </a:blipFill>
             </p:spPr>
@@ -6377,8 +6385,8 @@
           </a:p>
         </p:txBody>
       </p:sp>
-      <mc:AlternateContent xmlns:mc="http://schemas.openxmlformats.org/markup-compatibility/2006" xmlns:a14="http://schemas.microsoft.com/office/drawing/2010/main">
-        <mc:Choice Requires="a14">
+      <mc:AlternateContent xmlns:mc="http://schemas.openxmlformats.org/markup-compatibility/2006">
+        <mc:Choice xmlns:a14="http://schemas.microsoft.com/office/drawing/2010/main" Requires="a14">
           <p:sp>
             <p:nvSpPr>
               <p:cNvPr id="10" name="TextBox 9">
@@ -6394,7 +6402,7 @@
             <p:spPr>
               <a:xfrm>
                 <a:off x="1016114" y="1638249"/>
-                <a:ext cx="1279581" cy="281937"/>
+                <a:ext cx="1410066" cy="281937"/>
               </a:xfrm>
               <a:prstGeom prst="rect">
                 <a:avLst/>
@@ -6482,6 +6490,13 @@
                               <a:latin typeface="Cambria Math" panose="02040503050406030204" pitchFamily="18" charset="0"/>
                               <a:ea typeface="Cambria Math" panose="02040503050406030204" pitchFamily="18" charset="0"/>
                             </a:rPr>
+                            <m:t>−</m:t>
+                          </m:r>
+                          <m:r>
+                            <a:rPr lang="da-DK" b="0" i="1" smtClean="0">
+                              <a:latin typeface="Cambria Math" panose="02040503050406030204" pitchFamily="18" charset="0"/>
+                              <a:ea typeface="Cambria Math" panose="02040503050406030204" pitchFamily="18" charset="0"/>
+                            </a:rPr>
                             <m:t>𝑘</m:t>
                           </m:r>
                           <m:r>
@@ -6508,7 +6523,7 @@
             </p:txBody>
           </p:sp>
         </mc:Choice>
-        <mc:Fallback xmlns="">
+        <mc:Fallback>
           <p:sp>
             <p:nvSpPr>
               <p:cNvPr id="10" name="TextBox 9">
@@ -6526,7 +6541,7 @@
             <p:spPr>
               <a:xfrm>
                 <a:off x="1016114" y="1638249"/>
-                <a:ext cx="1279581" cy="281937"/>
+                <a:ext cx="1410066" cy="281937"/>
               </a:xfrm>
               <a:prstGeom prst="rect">
                 <a:avLst/>
@@ -6534,7 +6549,7 @@
               <a:blipFill>
                 <a:blip r:embed="rId2"/>
                 <a:stretch>
-                  <a:fillRect l="-4762" t="-2174" r="-952" b="-15217"/>
+                  <a:fillRect l="-3896" t="-2174" r="-433" b="-15217"/>
                 </a:stretch>
               </a:blipFill>
             </p:spPr>
@@ -8902,6 +8917,275 @@
 </p:sld>
 </file>
 
+<file path=ppt/slides/slide9.xml><?xml version="1.0" encoding="utf-8"?>
+<p:sld xmlns:a="http://schemas.openxmlformats.org/drawingml/2006/main" xmlns:r="http://schemas.openxmlformats.org/officeDocument/2006/relationships" xmlns:p="http://schemas.openxmlformats.org/presentationml/2006/main">
+  <p:cSld>
+    <p:spTree>
+      <p:nvGrpSpPr>
+        <p:cNvPr id="1" name=""/>
+        <p:cNvGrpSpPr/>
+        <p:nvPr/>
+      </p:nvGrpSpPr>
+      <p:grpSpPr>
+        <a:xfrm>
+          <a:off x="0" y="0"/>
+          <a:ext cx="0" cy="0"/>
+          <a:chOff x="0" y="0"/>
+          <a:chExt cx="0" cy="0"/>
+        </a:xfrm>
+      </p:grpSpPr>
+      <p:sp>
+        <p:nvSpPr>
+          <p:cNvPr id="2" name="Title 1">
+            <a:extLst>
+              <a:ext uri="{FF2B5EF4-FFF2-40B4-BE49-F238E27FC236}">
+                <a16:creationId xmlns:a16="http://schemas.microsoft.com/office/drawing/2014/main" id="{8CAAF1BE-950F-8980-3879-92150E6CA5C2}"/>
+              </a:ext>
+            </a:extLst>
+          </p:cNvPr>
+          <p:cNvSpPr>
+            <a:spLocks noGrp="1"/>
+          </p:cNvSpPr>
+          <p:nvPr>
+            <p:ph type="title"/>
+          </p:nvPr>
+        </p:nvSpPr>
+        <p:spPr/>
+        <p:txBody>
+          <a:bodyPr/>
+          <a:lstStyle/>
+          <a:p>
+            <a:r>
+              <a:rPr lang="da-DK" dirty="0"/>
+              <a:t>Tips for </a:t>
+            </a:r>
+            <a:r>
+              <a:rPr lang="da-DK" dirty="0" err="1"/>
+              <a:t>implementing</a:t>
+            </a:r>
+            <a:endParaRPr lang="da-DK" dirty="0"/>
+          </a:p>
+        </p:txBody>
+      </p:sp>
+      <p:sp>
+        <p:nvSpPr>
+          <p:cNvPr id="3" name="Content Placeholder 2">
+            <a:extLst>
+              <a:ext uri="{FF2B5EF4-FFF2-40B4-BE49-F238E27FC236}">
+                <a16:creationId xmlns:a16="http://schemas.microsoft.com/office/drawing/2014/main" id="{066F76C4-98CD-691B-871D-47ECA3EB0EF7}"/>
+              </a:ext>
+            </a:extLst>
+          </p:cNvPr>
+          <p:cNvSpPr>
+            <a:spLocks noGrp="1"/>
+          </p:cNvSpPr>
+          <p:nvPr>
+            <p:ph idx="1"/>
+          </p:nvPr>
+        </p:nvSpPr>
+        <p:spPr/>
+        <p:txBody>
+          <a:bodyPr/>
+          <a:lstStyle/>
+          <a:p>
+            <a:pPr marL="514350" indent="-514350">
+              <a:buAutoNum type="arabicPeriod"/>
+            </a:pPr>
+            <a:r>
+              <a:rPr lang="da-DK" dirty="0"/>
+              <a:t>Start with </a:t>
+            </a:r>
+            <a:r>
+              <a:rPr lang="da-DK" dirty="0" err="1"/>
+              <a:t>everything</a:t>
+            </a:r>
+            <a:r>
+              <a:rPr lang="da-DK" dirty="0"/>
+              <a:t> in same script</a:t>
+            </a:r>
+          </a:p>
+          <a:p>
+            <a:pPr marL="514350" indent="-514350">
+              <a:buAutoNum type="arabicPeriod"/>
+            </a:pPr>
+            <a:r>
+              <a:rPr lang="da-DK" dirty="0"/>
+              <a:t>Make sure it </a:t>
+            </a:r>
+            <a:r>
+              <a:rPr lang="da-DK" dirty="0" err="1"/>
+              <a:t>works</a:t>
+            </a:r>
+            <a:r>
+              <a:rPr lang="da-DK" dirty="0"/>
+              <a:t> </a:t>
+            </a:r>
+            <a:r>
+              <a:rPr lang="da-DK" dirty="0">
+                <a:sym typeface="Wingdings" panose="05000000000000000000" pitchFamily="2" charset="2"/>
+              </a:rPr>
+              <a:t> </a:t>
+            </a:r>
+            <a:r>
+              <a:rPr lang="da-DK" dirty="0" err="1">
+                <a:sym typeface="Wingdings" panose="05000000000000000000" pitchFamily="2" charset="2"/>
+              </a:rPr>
+              <a:t>then</a:t>
+            </a:r>
+            <a:r>
+              <a:rPr lang="da-DK" dirty="0">
+                <a:sym typeface="Wingdings" panose="05000000000000000000" pitchFamily="2" charset="2"/>
+              </a:rPr>
+              <a:t> separate in model and </a:t>
+            </a:r>
+            <a:r>
+              <a:rPr lang="da-DK" dirty="0" err="1">
+                <a:sym typeface="Wingdings" panose="05000000000000000000" pitchFamily="2" charset="2"/>
+              </a:rPr>
+              <a:t>prediction</a:t>
+            </a:r>
+            <a:r>
+              <a:rPr lang="da-DK" dirty="0">
+                <a:sym typeface="Wingdings" panose="05000000000000000000" pitchFamily="2" charset="2"/>
+              </a:rPr>
+              <a:t> files</a:t>
+            </a:r>
+          </a:p>
+          <a:p>
+            <a:pPr marL="514350" indent="-514350">
+              <a:buAutoNum type="arabicPeriod"/>
+            </a:pPr>
+            <a:r>
+              <a:rPr lang="da-DK" dirty="0" err="1">
+                <a:sym typeface="Wingdings" panose="05000000000000000000" pitchFamily="2" charset="2"/>
+              </a:rPr>
+              <a:t>Modifying</a:t>
+            </a:r>
+            <a:r>
+              <a:rPr lang="da-DK" dirty="0">
+                <a:sym typeface="Wingdings" panose="05000000000000000000" pitchFamily="2" charset="2"/>
+              </a:rPr>
+              <a:t> the </a:t>
+            </a:r>
+            <a:r>
+              <a:rPr lang="da-DK" dirty="0" err="1">
+                <a:sym typeface="Wingdings" panose="05000000000000000000" pitchFamily="2" charset="2"/>
+              </a:rPr>
+              <a:t>one</a:t>
+            </a:r>
+            <a:r>
+              <a:rPr lang="da-DK" dirty="0">
+                <a:sym typeface="Wingdings" panose="05000000000000000000" pitchFamily="2" charset="2"/>
+              </a:rPr>
+              <a:t> file </a:t>
+            </a:r>
+            <a:r>
+              <a:rPr lang="da-DK" dirty="0" err="1">
+                <a:sym typeface="Wingdings" panose="05000000000000000000" pitchFamily="2" charset="2"/>
+              </a:rPr>
+              <a:t>might</a:t>
+            </a:r>
+            <a:r>
+              <a:rPr lang="da-DK" dirty="0">
+                <a:sym typeface="Wingdings" panose="05000000000000000000" pitchFamily="2" charset="2"/>
+              </a:rPr>
+              <a:t> not </a:t>
+            </a:r>
+            <a:r>
+              <a:rPr lang="da-DK" dirty="0" err="1">
+                <a:sym typeface="Wingdings" panose="05000000000000000000" pitchFamily="2" charset="2"/>
+              </a:rPr>
+              <a:t>be</a:t>
+            </a:r>
+            <a:r>
+              <a:rPr lang="da-DK" dirty="0">
+                <a:sym typeface="Wingdings" panose="05000000000000000000" pitchFamily="2" charset="2"/>
+              </a:rPr>
+              <a:t> </a:t>
+            </a:r>
+            <a:r>
+              <a:rPr lang="da-DK" dirty="0" err="1">
+                <a:sym typeface="Wingdings" panose="05000000000000000000" pitchFamily="2" charset="2"/>
+              </a:rPr>
+              <a:t>updated</a:t>
+            </a:r>
+            <a:r>
+              <a:rPr lang="da-DK" dirty="0">
+                <a:sym typeface="Wingdings" panose="05000000000000000000" pitchFamily="2" charset="2"/>
+              </a:rPr>
+              <a:t> in </a:t>
+            </a:r>
+            <a:r>
+              <a:rPr lang="da-DK" dirty="0" err="1">
+                <a:sym typeface="Wingdings" panose="05000000000000000000" pitchFamily="2" charset="2"/>
+              </a:rPr>
+              <a:t>other</a:t>
+            </a:r>
+            <a:r>
+              <a:rPr lang="da-DK" dirty="0">
+                <a:sym typeface="Wingdings" panose="05000000000000000000" pitchFamily="2" charset="2"/>
+              </a:rPr>
+              <a:t> script.</a:t>
+            </a:r>
+          </a:p>
+          <a:p>
+            <a:pPr marL="0" indent="0">
+              <a:buNone/>
+            </a:pPr>
+            <a:r>
+              <a:rPr lang="da-DK" dirty="0">
+                <a:sym typeface="Wingdings" panose="05000000000000000000" pitchFamily="2" charset="2"/>
+              </a:rPr>
+              <a:t>Restart session or </a:t>
+            </a:r>
+            <a:r>
+              <a:rPr lang="da-DK" dirty="0" err="1">
+                <a:sym typeface="Wingdings" panose="05000000000000000000" pitchFamily="2" charset="2"/>
+              </a:rPr>
+              <a:t>use</a:t>
+            </a:r>
+            <a:r>
+              <a:rPr lang="da-DK" dirty="0">
+                <a:sym typeface="Wingdings" panose="05000000000000000000" pitchFamily="2" charset="2"/>
+              </a:rPr>
+              <a:t> the </a:t>
+            </a:r>
+            <a:r>
+              <a:rPr lang="da-DK" dirty="0" err="1">
+                <a:sym typeface="Wingdings" panose="05000000000000000000" pitchFamily="2" charset="2"/>
+              </a:rPr>
+              <a:t>importlib.reload</a:t>
+            </a:r>
+            <a:r>
+              <a:rPr lang="da-DK" dirty="0">
+                <a:sym typeface="Wingdings" panose="05000000000000000000" pitchFamily="2" charset="2"/>
+              </a:rPr>
+              <a:t> </a:t>
+            </a:r>
+            <a:r>
+              <a:rPr lang="da-DK">
+                <a:sym typeface="Wingdings" panose="05000000000000000000" pitchFamily="2" charset="2"/>
+              </a:rPr>
+              <a:t>function</a:t>
+            </a:r>
+            <a:endParaRPr lang="da-DK"/>
+          </a:p>
+        </p:txBody>
+      </p:sp>
+    </p:spTree>
+    <p:extLst>
+      <p:ext uri="{BB962C8B-B14F-4D97-AF65-F5344CB8AC3E}">
+        <p14:creationId xmlns:p14="http://schemas.microsoft.com/office/powerpoint/2010/main" val="87427438"/>
+      </p:ext>
+    </p:extLst>
+  </p:cSld>
+  <p:clrMapOvr>
+    <a:masterClrMapping/>
+  </p:clrMapOvr>
+  <p:transition/>
+</p:sld>
+</file>
+
 <file path=ppt/tags/tag1.xml><?xml version="1.0" encoding="utf-8"?>
 <p:tagLst xmlns:a="http://schemas.openxmlformats.org/drawingml/2006/main" xmlns:r="http://schemas.openxmlformats.org/officeDocument/2006/relationships" xmlns:p="http://schemas.openxmlformats.org/presentationml/2006/main">
   <p:tag name="AS_NET" val="6.0.27"/>
@@ -9228,11 +9512,11 @@
 </file>
 
 <file path=customXml/item1.xml><?xml version="1.0" encoding="utf-8"?>
-<TemplafyTemplateConfiguration><![CDATA[{"elementsMetadata":[],"transformationConfigurations":[],"templateName":"blankpresentation","templateDescription":"","enableDocumentContentUpdater":false,"version":"2.0"}]]></TemplafyTemplateConfiguration>
+<TemplafyFormConfiguration><![CDATA[{"formFields":[],"formDataEntries":[]}]]></TemplafyFormConfiguration>
 </file>
 
 <file path=customXml/item2.xml><?xml version="1.0" encoding="utf-8"?>
-<TemplafyFormConfiguration><![CDATA[{"formFields":[],"formDataEntries":[]}]]></TemplafyFormConfiguration>
+<TemplafyTemplateConfiguration><![CDATA[{"elementsMetadata":[],"transformationConfigurations":[],"templateName":"blankpresentation","templateDescription":"","enableDocumentContentUpdater":false,"version":"2.0"}]]></TemplafyTemplateConfiguration>
 </file>
 
 <file path=customXml/item3.xml><?xml version="1.0" encoding="utf-8"?>
@@ -9244,13 +9528,13 @@
 </file>
 
 <file path=customXml/itemProps1.xml><?xml version="1.0" encoding="utf-8"?>
-<ds:datastoreItem xmlns:ds="http://schemas.openxmlformats.org/officeDocument/2006/customXml" ds:itemID="{386C9AF7-FC43-4772-BF6D-26FE95C56D62}">
+<ds:datastoreItem xmlns:ds="http://schemas.openxmlformats.org/officeDocument/2006/customXml" ds:itemID="{C5938109-F486-41EA-929F-D7DF65C5D6B1}">
   <ds:schemaRefs/>
 </ds:datastoreItem>
 </file>
 
 <file path=customXml/itemProps2.xml><?xml version="1.0" encoding="utf-8"?>
-<ds:datastoreItem xmlns:ds="http://schemas.openxmlformats.org/officeDocument/2006/customXml" ds:itemID="{C5938109-F486-41EA-929F-D7DF65C5D6B1}">
+<ds:datastoreItem xmlns:ds="http://schemas.openxmlformats.org/officeDocument/2006/customXml" ds:itemID="{386C9AF7-FC43-4772-BF6D-26FE95C56D62}">
   <ds:schemaRefs/>
 </ds:datastoreItem>
 </file>
